--- a/classes/parte-1-redes-y-seguridad-de-redes/038-seguridad-wifi-wpa2-wpa3-y-superficie-de-ataque/clase-038-presentacion.pptx
+++ b/classes/parte-1-redes-y-seguridad-de-redes/038-seguridad-wifi-wpa2-wpa3-y-superficie-de-ataque/clase-038-presentacion.pptx
@@ -17,6 +17,9 @@
     <p:sldId id="265" r:id="rId16"/>
     <p:sldId id="266" r:id="rId17"/>
     <p:sldId id="267" r:id="rId18"/>
+    <p:sldId id="268" r:id="rId19"/>
+    <p:sldId id="269" r:id="rId20"/>
+    <p:sldId id="270" r:id="rId21"/>
   </p:sldIdLst>
   <p:sldSz cx="9144000" cy="6858000" type="screen4x3"/>
   <p:notesSz cx="6858000" cy="9144000"/>
@@ -3198,7 +3201,7 @@
                   <a:srgbClr val="0B3D2E"/>
                 </a:solidFill>
               </a:rPr>
-              <a:t>⚠️ Errores comunes</a:t>
+              <a:t>✍️ Ejercicios</a:t>
             </a:r>
           </a:p>
         </p:txBody>
@@ -3236,67 +3239,82 @@
                   <a:srgbClr val="22282E"/>
                 </a:solidFill>
               </a:rPr>
-              <a:t>•  No aparece "WPA handshake" — No había cliente que reautenticar; conecta un dispositivo propio o usa PMKID</a:t>
-            </a:r>
-          </a:p>
-          <a:p>
-            <a:pPr>
-              <a:spcAft>
-                <a:spcPts val="600"/>
-              </a:spcAft>
-            </a:pPr>
-            <a:r>
-              <a:rPr sz="1500">
-                <a:solidFill>
-                  <a:srgbClr val="22282E"/>
-                </a:solidFill>
-              </a:rPr>
-              <a:t>•  El adaptador no entra en modo monitor — Chipset no compatible; usa uno con soporte de monitor/inyección</a:t>
-            </a:r>
-          </a:p>
-          <a:p>
-            <a:pPr>
-              <a:spcAft>
-                <a:spcPts val="600"/>
-              </a:spcAft>
-            </a:pPr>
-            <a:r>
-              <a:rPr sz="1500">
-                <a:solidFill>
-                  <a:srgbClr val="22282E"/>
-                </a:solidFill>
-              </a:rPr>
-              <a:t>•  aireplay-ng "no such BSSID" — Estás en el canal equivocado; fija -c al canal correcto</a:t>
-            </a:r>
-          </a:p>
-          <a:p>
-            <a:pPr>
-              <a:spcAft>
-                <a:spcPts val="600"/>
-              </a:spcAft>
-            </a:pPr>
-            <a:r>
-              <a:rPr sz="1500">
-                <a:solidFill>
-                  <a:srgbClr val="22282E"/>
-                </a:solidFill>
-              </a:rPr>
-              <a:t>•  Crackeo eterno — Passphrase fuera del diccionario; contra WPA2 fuerte es inviable, y eso es lo esperado</a:t>
-            </a:r>
-          </a:p>
-          <a:p>
-            <a:pPr>
-              <a:spcAft>
-                <a:spcPts val="600"/>
-              </a:spcAft>
-            </a:pPr>
-            <a:r>
-              <a:rPr sz="1500">
-                <a:solidFill>
-                  <a:srgbClr val="22282E"/>
-                </a:solidFill>
-              </a:rPr>
-              <a:t>•  Interferencia de NetworkManager — Detén servicios que gestionan la interfaz (airmon-ng check kill)</a:t>
+              <a:t>•  Identifica en airodump el BSSID, canal, cifrado y clientes de tu red de pruebas.</a:t>
+            </a:r>
+          </a:p>
+          <a:p>
+            <a:pPr>
+              <a:spcAft>
+                <a:spcPts val="600"/>
+              </a:spcAft>
+            </a:pPr>
+            <a:r>
+              <a:rPr sz="1500">
+                <a:solidFill>
+                  <a:srgbClr val="22282E"/>
+                </a:solidFill>
+              </a:rPr>
+              <a:t>•  Captura un handshake de tu red y verifica su validez con aircrack-ng (sin crackear).</a:t>
+            </a:r>
+          </a:p>
+          <a:p>
+            <a:pPr>
+              <a:spcAft>
+                <a:spcPts val="600"/>
+              </a:spcAft>
+            </a:pPr>
+            <a:r>
+              <a:rPr sz="1500">
+                <a:solidFill>
+                  <a:srgbClr val="22282E"/>
+                </a:solidFill>
+              </a:rPr>
+              <a:t>•  Compara el tiempo de crackeo de una passphrase débil vs. una de 15+ caracteres.</a:t>
+            </a:r>
+          </a:p>
+          <a:p>
+            <a:pPr>
+              <a:spcAft>
+                <a:spcPts val="600"/>
+              </a:spcAft>
+            </a:pPr>
+            <a:r>
+              <a:rPr sz="1500">
+                <a:solidFill>
+                  <a:srgbClr val="22282E"/>
+                </a:solidFill>
+              </a:rPr>
+              <a:t>•  Explica por qué WPA3-SAE frustra el crackeo offline por diccionario.</a:t>
+            </a:r>
+          </a:p>
+          <a:p>
+            <a:pPr>
+              <a:spcAft>
+                <a:spcPts val="600"/>
+              </a:spcAft>
+            </a:pPr>
+            <a:r>
+              <a:rPr sz="1500">
+                <a:solidFill>
+                  <a:srgbClr val="22282E"/>
+                </a:solidFill>
+              </a:rPr>
+              <a:t>•  Investiga cómo PMF (802.11w) mitiga los ataques de deauth.</a:t>
+            </a:r>
+          </a:p>
+          <a:p>
+            <a:pPr>
+              <a:spcAft>
+                <a:spcPts val="600"/>
+              </a:spcAft>
+            </a:pPr>
+            <a:r>
+              <a:rPr sz="1500">
+                <a:solidFill>
+                  <a:srgbClr val="22282E"/>
+                </a:solidFill>
+              </a:rPr>
+              <a:t>•  Documenta cómo detectarías un evil twin (dos BSSID con el mismo SSID, señales anómalas).</a:t>
             </a:r>
           </a:p>
         </p:txBody>
@@ -3347,7 +3365,7 @@
                   <a:srgbClr val="0B3D2E"/>
                 </a:solidFill>
               </a:rPr>
-              <a:t>❓ Preguntas frecuentes</a:t>
+              <a:t>📝 Reto verificable</a:t>
             </a:r>
           </a:p>
         </p:txBody>
@@ -3385,97 +3403,22 @@
                   <a:srgbClr val="22282E"/>
                 </a:solidFill>
               </a:rPr>
-              <a:t>•  ❓ ¿Por qué WPA2 es crackeable y WPA3 no (por diccionario)?</a:t>
-            </a:r>
-          </a:p>
-          <a:p>
-            <a:pPr>
-              <a:spcAft>
-                <a:spcPts val="600"/>
-              </a:spcAft>
-            </a:pPr>
-            <a:r>
-              <a:rPr sz="1500">
-                <a:solidFill>
-                  <a:srgbClr val="22282E"/>
-                </a:solidFill>
-              </a:rPr>
-              <a:t>•  WPA2-PSK permite capturar el handshake y probar millones de contraseñas offline. WPA3-SAE usa un intercambio (Dragonfly) que obliga a interactuar con el AP por cada intento, haciendo inviable el ataque offline.</a:t>
-            </a:r>
-          </a:p>
-          <a:p>
-            <a:pPr>
-              <a:spcAft>
-                <a:spcPts val="600"/>
-              </a:spcAft>
-            </a:pPr>
-            <a:r>
-              <a:rPr sz="1500">
-                <a:solidFill>
-                  <a:srgbClr val="22282E"/>
-                </a:solidFill>
-              </a:rPr>
-              <a:t>•  ❓ ¿La deauth "hackea" la red?</a:t>
-            </a:r>
-          </a:p>
-          <a:p>
-            <a:pPr>
-              <a:spcAft>
-                <a:spcPts val="600"/>
-              </a:spcAft>
-            </a:pPr>
-            <a:r>
-              <a:rPr sz="1500">
-                <a:solidFill>
-                  <a:srgbClr val="22282E"/>
-                </a:solidFill>
-              </a:rPr>
-              <a:t>•  No, solo desconecta clientes para forzar un nuevo handshake (o para denegar servicio). PMF la mitiga. Es disruptiva y solo se prueba en redes propias.</a:t>
-            </a:r>
-          </a:p>
-          <a:p>
-            <a:pPr>
-              <a:spcAft>
-                <a:spcPts val="600"/>
-              </a:spcAft>
-            </a:pPr>
-            <a:r>
-              <a:rPr sz="1500">
-                <a:solidFill>
-                  <a:srgbClr val="22282E"/>
-                </a:solidFill>
-              </a:rPr>
-              <a:t>•  ❓ ¿Necesito un cliente conectado para atacar WPA2?</a:t>
-            </a:r>
-          </a:p>
-          <a:p>
-            <a:pPr>
-              <a:spcAft>
-                <a:spcPts val="600"/>
-              </a:spcAft>
-            </a:pPr>
-            <a:r>
-              <a:rPr sz="1500">
-                <a:solidFill>
-                  <a:srgbClr val="22282E"/>
-                </a:solidFill>
-              </a:rPr>
-              <a:t>•  Para el handshake clásico, sí. El ataque PMKID puede funcionar sin clientes en AP vulnerables.</a:t>
-            </a:r>
-          </a:p>
-          <a:p>
-            <a:pPr>
-              <a:spcAft>
-                <a:spcPts val="600"/>
-              </a:spcAft>
-            </a:pPr>
-            <a:r>
-              <a:rPr sz="1500">
-                <a:solidFill>
-                  <a:srgbClr val="22282E"/>
-                </a:solidFill>
-              </a:rPr>
-              <a:t>•  ❓ ¿Qué es lo más importante para asegurar mi WiFi?</a:t>
+              <a:t>•  Sobre tu propia red de laboratorio configurada con una passphrase débil que tú elijas, captura el handshake (o el PMKID), realiza el crackeo offline y recupera la passphrase. Luego reconfigura el AP…</a:t>
+            </a:r>
+          </a:p>
+          <a:p>
+            <a:pPr>
+              <a:spcAft>
+                <a:spcPts val="600"/>
+              </a:spcAft>
+            </a:pPr>
+            <a:r>
+              <a:rPr sz="1500">
+                <a:solidFill>
+                  <a:srgbClr val="22282E"/>
+                </a:solidFill>
+              </a:rPr>
+              <a:t>•  Criterio de aceptación: recuperas la passphrase débil por diccionario y documentas que, tras endurecer el AP (WPA3/passphrase fuerte), el ataque no la obtiene. Toda la actividad es sobre tu red…</a:t>
             </a:r>
           </a:p>
         </p:txBody>
@@ -3526,7 +3469,7 @@
                   <a:srgbClr val="0B3D2E"/>
                 </a:solidFill>
               </a:rPr>
-              <a:t>🔗 Referencias</a:t>
+              <a:t>⚠️ Errores comunes</a:t>
             </a:r>
           </a:p>
         </p:txBody>
@@ -3564,6 +3507,334 @@
                   <a:srgbClr val="22282E"/>
                 </a:solidFill>
               </a:rPr>
+              <a:t>•  No aparece "WPA handshake" — No había cliente que reautenticar; conecta un dispositivo propio o usa PMKID</a:t>
+            </a:r>
+          </a:p>
+          <a:p>
+            <a:pPr>
+              <a:spcAft>
+                <a:spcPts val="600"/>
+              </a:spcAft>
+            </a:pPr>
+            <a:r>
+              <a:rPr sz="1500">
+                <a:solidFill>
+                  <a:srgbClr val="22282E"/>
+                </a:solidFill>
+              </a:rPr>
+              <a:t>•  El adaptador no entra en modo monitor — Chipset no compatible; usa uno con soporte de monitor/inyección</a:t>
+            </a:r>
+          </a:p>
+          <a:p>
+            <a:pPr>
+              <a:spcAft>
+                <a:spcPts val="600"/>
+              </a:spcAft>
+            </a:pPr>
+            <a:r>
+              <a:rPr sz="1500">
+                <a:solidFill>
+                  <a:srgbClr val="22282E"/>
+                </a:solidFill>
+              </a:rPr>
+              <a:t>•  aireplay-ng "no such BSSID" — Estás en el canal equivocado; fija -c al canal correcto</a:t>
+            </a:r>
+          </a:p>
+          <a:p>
+            <a:pPr>
+              <a:spcAft>
+                <a:spcPts val="600"/>
+              </a:spcAft>
+            </a:pPr>
+            <a:r>
+              <a:rPr sz="1500">
+                <a:solidFill>
+                  <a:srgbClr val="22282E"/>
+                </a:solidFill>
+              </a:rPr>
+              <a:t>•  Crackeo eterno — Passphrase fuera del diccionario; contra WPA2 fuerte es inviable, y eso es lo esperado</a:t>
+            </a:r>
+          </a:p>
+          <a:p>
+            <a:pPr>
+              <a:spcAft>
+                <a:spcPts val="600"/>
+              </a:spcAft>
+            </a:pPr>
+            <a:r>
+              <a:rPr sz="1500">
+                <a:solidFill>
+                  <a:srgbClr val="22282E"/>
+                </a:solidFill>
+              </a:rPr>
+              <a:t>•  Interferencia de NetworkManager — Detén servicios que gestionan la interfaz (airmon-ng check kill)</a:t>
+            </a:r>
+          </a:p>
+        </p:txBody>
+      </p:sp>
+    </p:spTree>
+  </p:cSld>
+  <p:clrMapOvr>
+    <a:masterClrMapping/>
+  </p:clrMapOvr>
+</p:sld>
+</file>
+
+<file path=ppt/slides/slide13.xml><?xml version="1.0" encoding="utf-8"?>
+<p:sld xmlns:a="http://schemas.openxmlformats.org/drawingml/2006/main" xmlns:p="http://schemas.openxmlformats.org/presentationml/2006/main" xmlns:r="http://schemas.openxmlformats.org/officeDocument/2006/relationships">
+  <p:cSld>
+    <p:spTree>
+      <p:nvGrpSpPr>
+        <p:cNvPr id="1" name=""/>
+        <p:cNvGrpSpPr/>
+        <p:nvPr/>
+      </p:nvGrpSpPr>
+      <p:grpSpPr/>
+      <p:sp>
+        <p:nvSpPr>
+          <p:cNvPr id="2" name="TextBox 1"/>
+          <p:cNvSpPr txBox="1"/>
+          <p:nvPr/>
+        </p:nvSpPr>
+        <p:spPr>
+          <a:xfrm>
+            <a:off x="457200" y="320040"/>
+            <a:ext cx="8229600" cy="822960"/>
+          </a:xfrm>
+          <a:prstGeom prst="rect">
+            <a:avLst/>
+          </a:prstGeom>
+          <a:noFill/>
+        </p:spPr>
+        <p:txBody>
+          <a:bodyPr wrap="square">
+            <a:spAutoFit/>
+          </a:bodyPr>
+          <a:lstStyle/>
+          <a:p>
+            <a:r>
+              <a:rPr sz="2600" b="1">
+                <a:solidFill>
+                  <a:srgbClr val="0B3D2E"/>
+                </a:solidFill>
+              </a:rPr>
+              <a:t>❓ Preguntas frecuentes</a:t>
+            </a:r>
+          </a:p>
+        </p:txBody>
+      </p:sp>
+      <p:sp>
+        <p:nvSpPr>
+          <p:cNvPr id="3" name="TextBox 2"/>
+          <p:cNvSpPr txBox="1"/>
+          <p:nvPr/>
+        </p:nvSpPr>
+        <p:spPr>
+          <a:xfrm>
+            <a:off x="457200" y="1280160"/>
+            <a:ext cx="8229600" cy="4937760"/>
+          </a:xfrm>
+          <a:prstGeom prst="rect">
+            <a:avLst/>
+          </a:prstGeom>
+          <a:noFill/>
+        </p:spPr>
+        <p:txBody>
+          <a:bodyPr wrap="square">
+            <a:spAutoFit/>
+          </a:bodyPr>
+          <a:lstStyle/>
+          <a:p>
+            <a:pPr>
+              <a:spcAft>
+                <a:spcPts val="600"/>
+              </a:spcAft>
+            </a:pPr>
+            <a:r>
+              <a:rPr sz="1500">
+                <a:solidFill>
+                  <a:srgbClr val="22282E"/>
+                </a:solidFill>
+              </a:rPr>
+              <a:t>•  ❓ ¿Por qué WPA2 es crackeable y WPA3 no (por diccionario)?</a:t>
+            </a:r>
+          </a:p>
+          <a:p>
+            <a:pPr>
+              <a:spcAft>
+                <a:spcPts val="600"/>
+              </a:spcAft>
+            </a:pPr>
+            <a:r>
+              <a:rPr sz="1500">
+                <a:solidFill>
+                  <a:srgbClr val="22282E"/>
+                </a:solidFill>
+              </a:rPr>
+              <a:t>•  WPA2-PSK permite capturar el handshake y probar millones de contraseñas offline. WPA3-SAE usa un intercambio (Dragonfly) que obliga a interactuar con el AP por cada intento, haciendo inviable el…</a:t>
+            </a:r>
+          </a:p>
+          <a:p>
+            <a:pPr>
+              <a:spcAft>
+                <a:spcPts val="600"/>
+              </a:spcAft>
+            </a:pPr>
+            <a:r>
+              <a:rPr sz="1500">
+                <a:solidFill>
+                  <a:srgbClr val="22282E"/>
+                </a:solidFill>
+              </a:rPr>
+              <a:t>•  ❓ ¿La deauth "hackea" la red?</a:t>
+            </a:r>
+          </a:p>
+          <a:p>
+            <a:pPr>
+              <a:spcAft>
+                <a:spcPts val="600"/>
+              </a:spcAft>
+            </a:pPr>
+            <a:r>
+              <a:rPr sz="1500">
+                <a:solidFill>
+                  <a:srgbClr val="22282E"/>
+                </a:solidFill>
+              </a:rPr>
+              <a:t>•  No, solo desconecta clientes para forzar un nuevo handshake (o para denegar servicio). PMF la mitiga. Es disruptiva y solo se prueba en redes propias.</a:t>
+            </a:r>
+          </a:p>
+          <a:p>
+            <a:pPr>
+              <a:spcAft>
+                <a:spcPts val="600"/>
+              </a:spcAft>
+            </a:pPr>
+            <a:r>
+              <a:rPr sz="1500">
+                <a:solidFill>
+                  <a:srgbClr val="22282E"/>
+                </a:solidFill>
+              </a:rPr>
+              <a:t>•  ❓ ¿Necesito un cliente conectado para atacar WPA2?</a:t>
+            </a:r>
+          </a:p>
+          <a:p>
+            <a:pPr>
+              <a:spcAft>
+                <a:spcPts val="600"/>
+              </a:spcAft>
+            </a:pPr>
+            <a:r>
+              <a:rPr sz="1500">
+                <a:solidFill>
+                  <a:srgbClr val="22282E"/>
+                </a:solidFill>
+              </a:rPr>
+              <a:t>•  Para el handshake clásico, sí. El ataque PMKID puede funcionar sin clientes en AP vulnerables.</a:t>
+            </a:r>
+          </a:p>
+          <a:p>
+            <a:pPr>
+              <a:spcAft>
+                <a:spcPts val="600"/>
+              </a:spcAft>
+            </a:pPr>
+            <a:r>
+              <a:rPr sz="1500">
+                <a:solidFill>
+                  <a:srgbClr val="22282E"/>
+                </a:solidFill>
+              </a:rPr>
+              <a:t>•  ❓ ¿Qué es lo más importante para asegurar mi WiFi?</a:t>
+            </a:r>
+          </a:p>
+        </p:txBody>
+      </p:sp>
+    </p:spTree>
+  </p:cSld>
+  <p:clrMapOvr>
+    <a:masterClrMapping/>
+  </p:clrMapOvr>
+</p:sld>
+</file>
+
+<file path=ppt/slides/slide14.xml><?xml version="1.0" encoding="utf-8"?>
+<p:sld xmlns:a="http://schemas.openxmlformats.org/drawingml/2006/main" xmlns:p="http://schemas.openxmlformats.org/presentationml/2006/main" xmlns:r="http://schemas.openxmlformats.org/officeDocument/2006/relationships">
+  <p:cSld>
+    <p:spTree>
+      <p:nvGrpSpPr>
+        <p:cNvPr id="1" name=""/>
+        <p:cNvGrpSpPr/>
+        <p:nvPr/>
+      </p:nvGrpSpPr>
+      <p:grpSpPr/>
+      <p:sp>
+        <p:nvSpPr>
+          <p:cNvPr id="2" name="TextBox 1"/>
+          <p:cNvSpPr txBox="1"/>
+          <p:nvPr/>
+        </p:nvSpPr>
+        <p:spPr>
+          <a:xfrm>
+            <a:off x="457200" y="320040"/>
+            <a:ext cx="8229600" cy="822960"/>
+          </a:xfrm>
+          <a:prstGeom prst="rect">
+            <a:avLst/>
+          </a:prstGeom>
+          <a:noFill/>
+        </p:spPr>
+        <p:txBody>
+          <a:bodyPr wrap="square">
+            <a:spAutoFit/>
+          </a:bodyPr>
+          <a:lstStyle/>
+          <a:p>
+            <a:r>
+              <a:rPr sz="2600" b="1">
+                <a:solidFill>
+                  <a:srgbClr val="0B3D2E"/>
+                </a:solidFill>
+              </a:rPr>
+              <a:t>🔗 Referencias</a:t>
+            </a:r>
+          </a:p>
+        </p:txBody>
+      </p:sp>
+      <p:sp>
+        <p:nvSpPr>
+          <p:cNvPr id="3" name="TextBox 2"/>
+          <p:cNvSpPr txBox="1"/>
+          <p:nvPr/>
+        </p:nvSpPr>
+        <p:spPr>
+          <a:xfrm>
+            <a:off x="457200" y="1280160"/>
+            <a:ext cx="8229600" cy="4937760"/>
+          </a:xfrm>
+          <a:prstGeom prst="rect">
+            <a:avLst/>
+          </a:prstGeom>
+          <a:noFill/>
+        </p:spPr>
+        <p:txBody>
+          <a:bodyPr wrap="square">
+            <a:spAutoFit/>
+          </a:bodyPr>
+          <a:lstStyle/>
+          <a:p>
+            <a:pPr>
+              <a:spcAft>
+                <a:spcPts val="600"/>
+              </a:spcAft>
+            </a:pPr>
+            <a:r>
+              <a:rPr sz="1500">
+                <a:solidFill>
+                  <a:srgbClr val="22282E"/>
+                </a:solidFill>
+              </a:rPr>
               <a:t>•  Aircrack-ng documentation. &lt;https://www.aircrack-ng.org/documentation.html&gt;</a:t>
             </a:r>
           </a:p>
@@ -3614,6 +3885,81 @@
           </a:p>
         </p:txBody>
       </p:sp>
+    </p:spTree>
+  </p:cSld>
+  <p:clrMapOvr>
+    <a:masterClrMapping/>
+  </p:clrMapOvr>
+</p:sld>
+</file>
+
+<file path=ppt/slides/slide15.xml><?xml version="1.0" encoding="utf-8"?>
+<p:sld xmlns:a="http://schemas.openxmlformats.org/drawingml/2006/main" xmlns:p="http://schemas.openxmlformats.org/presentationml/2006/main" xmlns:r="http://schemas.openxmlformats.org/officeDocument/2006/relationships">
+  <p:cSld>
+    <p:spTree>
+      <p:nvGrpSpPr>
+        <p:cNvPr id="1" name=""/>
+        <p:cNvGrpSpPr/>
+        <p:nvPr/>
+      </p:nvGrpSpPr>
+      <p:grpSpPr/>
+      <p:sp>
+        <p:nvSpPr>
+          <p:cNvPr id="2" name="TextBox 1"/>
+          <p:cNvSpPr txBox="1"/>
+          <p:nvPr/>
+        </p:nvSpPr>
+        <p:spPr>
+          <a:xfrm>
+            <a:off x="457200" y="274320"/>
+            <a:ext cx="8229600" cy="640080"/>
+          </a:xfrm>
+          <a:prstGeom prst="rect">
+            <a:avLst/>
+          </a:prstGeom>
+          <a:noFill/>
+        </p:spPr>
+        <p:txBody>
+          <a:bodyPr wrap="square">
+            <a:spAutoFit/>
+          </a:bodyPr>
+          <a:lstStyle/>
+          <a:p>
+            <a:r>
+              <a:rPr sz="2200" b="1">
+                <a:solidFill>
+                  <a:srgbClr val="0B3D2E"/>
+                </a:solidFill>
+              </a:rPr>
+              <a:t>Diagrama de la clase</a:t>
+            </a:r>
+          </a:p>
+        </p:txBody>
+      </p:sp>
+      <p:pic>
+        <p:nvPicPr>
+          <p:cNvPr id="3" name="Picture 2" descr="57e3d4cce111a03d.png"/>
+          <p:cNvPicPr>
+            <a:picLocks noChangeAspect="1"/>
+          </p:cNvPicPr>
+          <p:nvPr/>
+        </p:nvPicPr>
+        <p:blipFill>
+          <a:blip r:embed="rId2"/>
+          <a:stretch>
+            <a:fillRect/>
+          </a:stretch>
+        </p:blipFill>
+        <p:spPr>
+          <a:xfrm>
+            <a:off x="3461381" y="1097280"/>
+            <a:ext cx="2221238" cy="5303520"/>
+          </a:xfrm>
+          <a:prstGeom prst="rect">
+            <a:avLst/>
+          </a:prstGeom>
+        </p:spPr>
+      </p:pic>
     </p:spTree>
   </p:cSld>
   <p:clrMapOvr>
@@ -3698,7 +4044,7 @@
                   <a:srgbClr val="22282E"/>
                 </a:solidFill>
               </a:rPr>
-              <a:t>•  Comprender la seguridad de las redes inalámbricas 802.11: cómo funcionan WPA2 y WPA3, el handshake de autenticación, y las técnicas de ataque (captura de handshake, PMKID, deauth, evil twin) junto con sus defensas. El alumno practicará auditoría WiFi de su propia red en un entorno controlado.</a:t>
+              <a:t>•  Comprender la seguridad de las redes inalámbricas 802.11: cómo funcionan WPA2 y WPA3, el handshake de autenticación, y las técnicas de ataque (captura de handshake, PMKID, deauth, evil twin) junto…</a:t>
             </a:r>
           </a:p>
         </p:txBody>
@@ -4107,7 +4453,7 @@
                   <a:srgbClr val="0B3D2E"/>
                 </a:solidFill>
               </a:rPr>
-              <a:t>📖 Definiciones y características</a:t>
+              <a:t>🧠 Explicación en profundidad</a:t>
             </a:r>
           </a:p>
         </p:txBody>
@@ -4145,82 +4491,97 @@
                   <a:srgbClr val="22282E"/>
                 </a:solidFill>
               </a:rPr>
-              <a:t>•  WPA2-PSK: autenticación con clave precompartida; deriva la clave de sesión mediante un 4-way handshake que puede capturarse y atacarse offline por diccionario.</a:t>
-            </a:r>
-          </a:p>
-          <a:p>
-            <a:pPr>
-              <a:spcAft>
-                <a:spcPts val="600"/>
-              </a:spcAft>
-            </a:pPr>
-            <a:r>
-              <a:rPr sz="1500">
-                <a:solidFill>
-                  <a:srgbClr val="22282E"/>
-                </a:solidFill>
-              </a:rPr>
-              <a:t>•  4-way handshake: intercambio de cuatro mensajes EAPOL que confirma que ambas partes conocen la PSK y deriva claves de cifrado.</a:t>
-            </a:r>
-          </a:p>
-          <a:p>
-            <a:pPr>
-              <a:spcAft>
-                <a:spcPts val="600"/>
-              </a:spcAft>
-            </a:pPr>
-            <a:r>
-              <a:rPr sz="1500">
-                <a:solidFill>
-                  <a:srgbClr val="22282E"/>
-                </a:solidFill>
-              </a:rPr>
-              <a:t>•  PMKID: identificador presente en el primer mensaje EAPOL; en ciertos AP permite un ataque de crackeo sin necesidad de un cliente conectado.</a:t>
-            </a:r>
-          </a:p>
-          <a:p>
-            <a:pPr>
-              <a:spcAft>
-                <a:spcPts val="600"/>
-              </a:spcAft>
-            </a:pPr>
-            <a:r>
-              <a:rPr sz="1500">
-                <a:solidFill>
-                  <a:srgbClr val="22282E"/>
-                </a:solidFill>
-              </a:rPr>
-              <a:t>•  WPA3-SAE (Simultaneous Authentication of Equals): reemplaza el PSK vulnerable por un intercambio resistente a ataques offline y con forward secrecy.</a:t>
-            </a:r>
-          </a:p>
-          <a:p>
-            <a:pPr>
-              <a:spcAft>
-                <a:spcPts val="600"/>
-              </a:spcAft>
-            </a:pPr>
-            <a:r>
-              <a:rPr sz="1500">
-                <a:solidFill>
-                  <a:srgbClr val="22282E"/>
-                </a:solidFill>
-              </a:rPr>
-              <a:t>•  PMF (Protected Management Frames, 802.11w): protege tramas de gestión, mitigando ataques de deauth.</a:t>
-            </a:r>
-          </a:p>
-          <a:p>
-            <a:pPr>
-              <a:spcAft>
-                <a:spcPts val="600"/>
-              </a:spcAft>
-            </a:pPr>
-            <a:r>
-              <a:rPr sz="1500">
-                <a:solidFill>
-                  <a:srgbClr val="22282E"/>
-                </a:solidFill>
-              </a:rPr>
-              <a:t>•  Evil twin: punto de acceso falso que imita a uno legítimo para interceptar clientes.</a:t>
+              <a:t>•  En una red cableada, alcanzar el tráfico exige acceso físico al cable o al switch. En</a:t>
+            </a:r>
+          </a:p>
+          <a:p>
+            <a:pPr>
+              <a:spcAft>
+                <a:spcPts val="600"/>
+              </a:spcAft>
+            </a:pPr>
+            <a:r>
+              <a:rPr sz="1500">
+                <a:solidFill>
+                  <a:srgbClr val="22282E"/>
+                </a:solidFill>
+              </a:rPr>
+              <a:t>•  inalámbrico, el medio es el aire y cualquiera dentro del alcance recibe todas las</a:t>
+            </a:r>
+          </a:p>
+          <a:p>
+            <a:pPr>
+              <a:spcAft>
+                <a:spcPts val="600"/>
+              </a:spcAft>
+            </a:pPr>
+            <a:r>
+              <a:rPr sz="1500">
+                <a:solidFill>
+                  <a:srgbClr val="22282E"/>
+                </a:solidFill>
+              </a:rPr>
+              <a:t>•  tramas, aunque no esté conectado a la red. Esa diferencia es la raíz de toda la</a:t>
+            </a:r>
+          </a:p>
+          <a:p>
+            <a:pPr>
+              <a:spcAft>
+                <a:spcPts val="600"/>
+              </a:spcAft>
+            </a:pPr>
+            <a:r>
+              <a:rPr sz="1500">
+                <a:solidFill>
+                  <a:srgbClr val="22282E"/>
+                </a:solidFill>
+              </a:rPr>
+              <a:t>•  seguridad WiFi: el cifrado no es un extra, es lo único que impide que el vecino lea tu</a:t>
+            </a:r>
+          </a:p>
+          <a:p>
+            <a:pPr>
+              <a:spcAft>
+                <a:spcPts val="600"/>
+              </a:spcAft>
+            </a:pPr>
+            <a:r>
+              <a:rPr sz="1500">
+                <a:solidFill>
+                  <a:srgbClr val="22282E"/>
+                </a:solidFill>
+              </a:rPr>
+              <a:t>•  tráfico. Antes de hablar de ataques hay que fijar el vocabulario de 802.11: el SSID</a:t>
+            </a:r>
+          </a:p>
+          <a:p>
+            <a:pPr>
+              <a:spcAft>
+                <a:spcPts val="600"/>
+              </a:spcAft>
+            </a:pPr>
+            <a:r>
+              <a:rPr sz="1500">
+                <a:solidFill>
+                  <a:srgbClr val="22282E"/>
+                </a:solidFill>
+              </a:rPr>
+              <a:t>•  es el nombre de la red; el BSSID es la MAC del punto de acceso; y las tramas se</a:t>
+            </a:r>
+          </a:p>
+          <a:p>
+            <a:pPr>
+              <a:spcAft>
+                <a:spcPts val="600"/>
+              </a:spcAft>
+            </a:pPr>
+            <a:r>
+              <a:rPr sz="1500">
+                <a:solidFill>
+                  <a:srgbClr val="22282E"/>
+                </a:solidFill>
+              </a:rPr>
+              <a:t>•  dividen en tres tipos —gestión (asociación, autenticación, beacons), control</a:t>
             </a:r>
           </a:p>
         </p:txBody>
@@ -4271,7 +4632,7 @@
                   <a:srgbClr val="0B3D2E"/>
                 </a:solidFill>
               </a:rPr>
-              <a:t>🧰 Herramientas y preparación</a:t>
+              <a:t>📖 Definiciones y características</a:t>
             </a:r>
           </a:p>
         </p:txBody>
@@ -4309,52 +4670,82 @@
                   <a:srgbClr val="22282E"/>
                 </a:solidFill>
               </a:rPr>
-              <a:t>•  Aircrack-ng suite (airmon-ng, airodump-ng, aireplay-ng, aircrack-ng).</a:t>
-            </a:r>
-          </a:p>
-          <a:p>
-            <a:pPr>
-              <a:spcAft>
-                <a:spcPts val="600"/>
-              </a:spcAft>
-            </a:pPr>
-            <a:r>
-              <a:rPr sz="1500">
-                <a:solidFill>
-                  <a:srgbClr val="22282E"/>
-                </a:solidFill>
-              </a:rPr>
-              <a:t>•  hcxdumptool / hcxtools para PMKID.</a:t>
-            </a:r>
-          </a:p>
-          <a:p>
-            <a:pPr>
-              <a:spcAft>
-                <a:spcPts val="600"/>
-              </a:spcAft>
-            </a:pPr>
-            <a:r>
-              <a:rPr sz="1500">
-                <a:solidFill>
-                  <a:srgbClr val="22282E"/>
-                </a:solidFill>
-              </a:rPr>
-              <a:t>•  hashcat para crackeo offline por GPU.</a:t>
-            </a:r>
-          </a:p>
-          <a:p>
-            <a:pPr>
-              <a:spcAft>
-                <a:spcPts val="600"/>
-              </a:spcAft>
-            </a:pPr>
-            <a:r>
-              <a:rPr sz="1500">
-                <a:solidFill>
-                  <a:srgbClr val="22282E"/>
-                </a:solidFill>
-              </a:rPr>
-              <a:t>•  Un adaptador WiFi que soporte modo monitor e inyección (chipset compatible).</a:t>
+              <a:t>•  WPA2-PSK: autenticación con clave precompartida; deriva la clave de sesión mediante un 4-way handshake que puede capturarse y atacarse offline por diccionario.</a:t>
+            </a:r>
+          </a:p>
+          <a:p>
+            <a:pPr>
+              <a:spcAft>
+                <a:spcPts val="600"/>
+              </a:spcAft>
+            </a:pPr>
+            <a:r>
+              <a:rPr sz="1500">
+                <a:solidFill>
+                  <a:srgbClr val="22282E"/>
+                </a:solidFill>
+              </a:rPr>
+              <a:t>•  4-way handshake: intercambio de cuatro mensajes EAPOL que confirma que ambas partes conocen la PSK y deriva claves de cifrado.</a:t>
+            </a:r>
+          </a:p>
+          <a:p>
+            <a:pPr>
+              <a:spcAft>
+                <a:spcPts val="600"/>
+              </a:spcAft>
+            </a:pPr>
+            <a:r>
+              <a:rPr sz="1500">
+                <a:solidFill>
+                  <a:srgbClr val="22282E"/>
+                </a:solidFill>
+              </a:rPr>
+              <a:t>•  PMKID: identificador presente en el primer mensaje EAPOL; en ciertos AP permite un ataque de crackeo sin necesidad de un cliente conectado.</a:t>
+            </a:r>
+          </a:p>
+          <a:p>
+            <a:pPr>
+              <a:spcAft>
+                <a:spcPts val="600"/>
+              </a:spcAft>
+            </a:pPr>
+            <a:r>
+              <a:rPr sz="1500">
+                <a:solidFill>
+                  <a:srgbClr val="22282E"/>
+                </a:solidFill>
+              </a:rPr>
+              <a:t>•  WPA3-SAE (Simultaneous Authentication of Equals): reemplaza el PSK vulnerable por un intercambio resistente a ataques offline y con forward secrecy.</a:t>
+            </a:r>
+          </a:p>
+          <a:p>
+            <a:pPr>
+              <a:spcAft>
+                <a:spcPts val="600"/>
+              </a:spcAft>
+            </a:pPr>
+            <a:r>
+              <a:rPr sz="1500">
+                <a:solidFill>
+                  <a:srgbClr val="22282E"/>
+                </a:solidFill>
+              </a:rPr>
+              <a:t>•  PMF (Protected Management Frames, 802.11w): protege tramas de gestión, mitigando ataques de deauth.</a:t>
+            </a:r>
+          </a:p>
+          <a:p>
+            <a:pPr>
+              <a:spcAft>
+                <a:spcPts val="600"/>
+              </a:spcAft>
+            </a:pPr>
+            <a:r>
+              <a:rPr sz="1500">
+                <a:solidFill>
+                  <a:srgbClr val="22282E"/>
+                </a:solidFill>
+              </a:rPr>
+              <a:t>•  Evil twin: punto de acceso falso que imita a uno legítimo para interceptar clientes.</a:t>
             </a:r>
           </a:p>
         </p:txBody>
@@ -4405,7 +4796,7 @@
                   <a:srgbClr val="0B3D2E"/>
                 </a:solidFill>
               </a:rPr>
-              <a:t>🧪 Laboratorio guiado</a:t>
+              <a:t>📔 Glosario</a:t>
             </a:r>
           </a:p>
         </p:txBody>
@@ -4443,97 +4834,97 @@
                   <a:srgbClr val="22282E"/>
                 </a:solidFill>
               </a:rPr>
-              <a:t>•  Activa modo monitor en tu adaptador:</a:t>
-            </a:r>
-          </a:p>
-          <a:p>
-            <a:pPr>
-              <a:spcAft>
-                <a:spcPts val="600"/>
-              </a:spcAft>
-            </a:pPr>
-            <a:r>
-              <a:rPr sz="1500">
-                <a:solidFill>
-                  <a:srgbClr val="22282E"/>
-                </a:solidFill>
-              </a:rPr>
-              <a:t>•  sudo airmon-ng start wlan0        # crea wlan0mon</a:t>
-            </a:r>
-          </a:p>
-          <a:p>
-            <a:pPr>
-              <a:spcAft>
-                <a:spcPts val="600"/>
-              </a:spcAft>
-            </a:pPr>
-            <a:r>
-              <a:rPr sz="1500">
-                <a:solidFill>
-                  <a:srgbClr val="22282E"/>
-                </a:solidFill>
-              </a:rPr>
-              <a:t>•  Escanea redes cercanas (identifica tu red por su BSSID):</a:t>
-            </a:r>
-          </a:p>
-          <a:p>
-            <a:pPr>
-              <a:spcAft>
-                <a:spcPts val="600"/>
-              </a:spcAft>
-            </a:pPr>
-            <a:r>
-              <a:rPr sz="1500">
-                <a:solidFill>
-                  <a:srgbClr val="22282E"/>
-                </a:solidFill>
-              </a:rPr>
-              <a:t>•  sudo airodump-ng wlan0mon</a:t>
-            </a:r>
-          </a:p>
-          <a:p>
-            <a:pPr>
-              <a:spcAft>
-                <a:spcPts val="600"/>
-              </a:spcAft>
-            </a:pPr>
-            <a:r>
-              <a:rPr sz="1500">
-                <a:solidFill>
-                  <a:srgbClr val="22282E"/>
-                </a:solidFill>
-              </a:rPr>
-              <a:t>•  Captura en el canal de TU red:</a:t>
-            </a:r>
-          </a:p>
-          <a:p>
-            <a:pPr>
-              <a:spcAft>
-                <a:spcPts val="600"/>
-              </a:spcAft>
-            </a:pPr>
-            <a:r>
-              <a:rPr sz="1500">
-                <a:solidFill>
-                  <a:srgbClr val="22282E"/>
-                </a:solidFill>
-              </a:rPr>
-              <a:t>•  sudo airodump-ng -c 6 --bssid AA:BB:CC:DD:EE:FF -w captura wlan0mon</a:t>
-            </a:r>
-          </a:p>
-          <a:p>
-            <a:pPr>
-              <a:spcAft>
-                <a:spcPts val="600"/>
-              </a:spcAft>
-            </a:pPr>
-            <a:r>
-              <a:rPr sz="1500">
-                <a:solidFill>
-                  <a:srgbClr val="22282E"/>
-                </a:solidFill>
-              </a:rPr>
-              <a:t>•  Fuerza un handshake (sobre TU red, con un dispositivo propio) mediante una deauth breve:</a:t>
+              <a:t>•  Término — Definición concisa</a:t>
+            </a:r>
+          </a:p>
+          <a:p>
+            <a:pPr>
+              <a:spcAft>
+                <a:spcPts val="600"/>
+              </a:spcAft>
+            </a:pPr>
+            <a:r>
+              <a:rPr sz="1500">
+                <a:solidFill>
+                  <a:srgbClr val="22282E"/>
+                </a:solidFill>
+              </a:rPr>
+              <a:t>•  SSID — Nombre de la red inalámbrica</a:t>
+            </a:r>
+          </a:p>
+          <a:p>
+            <a:pPr>
+              <a:spcAft>
+                <a:spcPts val="600"/>
+              </a:spcAft>
+            </a:pPr>
+            <a:r>
+              <a:rPr sz="1500">
+                <a:solidFill>
+                  <a:srgbClr val="22282E"/>
+                </a:solidFill>
+              </a:rPr>
+              <a:t>•  BSSID — Dirección MAC del punto de acceso</a:t>
+            </a:r>
+          </a:p>
+          <a:p>
+            <a:pPr>
+              <a:spcAft>
+                <a:spcPts val="600"/>
+              </a:spcAft>
+            </a:pPr>
+            <a:r>
+              <a:rPr sz="1500">
+                <a:solidFill>
+                  <a:srgbClr val="22282E"/>
+                </a:solidFill>
+              </a:rPr>
+              <a:t>•  Tramas de gestión — Asociación, autenticación y beacons; superficie de ataque clave</a:t>
+            </a:r>
+          </a:p>
+          <a:p>
+            <a:pPr>
+              <a:spcAft>
+                <a:spcPts val="600"/>
+              </a:spcAft>
+            </a:pPr>
+            <a:r>
+              <a:rPr sz="1500">
+                <a:solidFill>
+                  <a:srgbClr val="22282E"/>
+                </a:solidFill>
+              </a:rPr>
+              <a:t>•  Modo monitor — Captura de tramas 802.11 crudas sin asociarse a la red</a:t>
+            </a:r>
+          </a:p>
+          <a:p>
+            <a:pPr>
+              <a:spcAft>
+                <a:spcPts val="600"/>
+              </a:spcAft>
+            </a:pPr>
+            <a:r>
+              <a:rPr sz="1500">
+                <a:solidFill>
+                  <a:srgbClr val="22282E"/>
+                </a:solidFill>
+              </a:rPr>
+              <a:t>•  WPA2-PSK — Cifrado con clave precompartida; vulnerable a crackeo offline</a:t>
+            </a:r>
+          </a:p>
+          <a:p>
+            <a:pPr>
+              <a:spcAft>
+                <a:spcPts val="600"/>
+              </a:spcAft>
+            </a:pPr>
+            <a:r>
+              <a:rPr sz="1500">
+                <a:solidFill>
+                  <a:srgbClr val="22282E"/>
+                </a:solidFill>
+              </a:rPr>
+              <a:t>•  4-way handshake — Intercambio que deriva la clave de sesión; capturable</a:t>
             </a:r>
           </a:p>
         </p:txBody>
@@ -4584,7 +4975,7 @@
                   <a:srgbClr val="0B3D2E"/>
                 </a:solidFill>
               </a:rPr>
-              <a:t>✍️ Ejercicios</a:t>
+              <a:t>🧰 Herramientas y preparación</a:t>
             </a:r>
           </a:p>
         </p:txBody>
@@ -4622,82 +5013,52 @@
                   <a:srgbClr val="22282E"/>
                 </a:solidFill>
               </a:rPr>
-              <a:t>•  Identifica en airodump el BSSID, canal, cifrado y clientes de tu red de pruebas.</a:t>
-            </a:r>
-          </a:p>
-          <a:p>
-            <a:pPr>
-              <a:spcAft>
-                <a:spcPts val="600"/>
-              </a:spcAft>
-            </a:pPr>
-            <a:r>
-              <a:rPr sz="1500">
-                <a:solidFill>
-                  <a:srgbClr val="22282E"/>
-                </a:solidFill>
-              </a:rPr>
-              <a:t>•  Captura un handshake de tu red y verifica su validez con aircrack-ng (sin crackear).</a:t>
-            </a:r>
-          </a:p>
-          <a:p>
-            <a:pPr>
-              <a:spcAft>
-                <a:spcPts val="600"/>
-              </a:spcAft>
-            </a:pPr>
-            <a:r>
-              <a:rPr sz="1500">
-                <a:solidFill>
-                  <a:srgbClr val="22282E"/>
-                </a:solidFill>
-              </a:rPr>
-              <a:t>•  Compara el tiempo de crackeo de una passphrase débil vs. una de 15+ caracteres.</a:t>
-            </a:r>
-          </a:p>
-          <a:p>
-            <a:pPr>
-              <a:spcAft>
-                <a:spcPts val="600"/>
-              </a:spcAft>
-            </a:pPr>
-            <a:r>
-              <a:rPr sz="1500">
-                <a:solidFill>
-                  <a:srgbClr val="22282E"/>
-                </a:solidFill>
-              </a:rPr>
-              <a:t>•  Explica por qué WPA3-SAE frustra el crackeo offline por diccionario.</a:t>
-            </a:r>
-          </a:p>
-          <a:p>
-            <a:pPr>
-              <a:spcAft>
-                <a:spcPts val="600"/>
-              </a:spcAft>
-            </a:pPr>
-            <a:r>
-              <a:rPr sz="1500">
-                <a:solidFill>
-                  <a:srgbClr val="22282E"/>
-                </a:solidFill>
-              </a:rPr>
-              <a:t>•  Investiga cómo PMF (802.11w) mitiga los ataques de deauth.</a:t>
-            </a:r>
-          </a:p>
-          <a:p>
-            <a:pPr>
-              <a:spcAft>
-                <a:spcPts val="600"/>
-              </a:spcAft>
-            </a:pPr>
-            <a:r>
-              <a:rPr sz="1500">
-                <a:solidFill>
-                  <a:srgbClr val="22282E"/>
-                </a:solidFill>
-              </a:rPr>
-              <a:t>•  Documenta cómo detectarías un evil twin (dos BSSID con el mismo SSID, señales anómalas).</a:t>
+              <a:t>•  Aircrack-ng suite (airmon-ng, airodump-ng, aireplay-ng, aircrack-ng).</a:t>
+            </a:r>
+          </a:p>
+          <a:p>
+            <a:pPr>
+              <a:spcAft>
+                <a:spcPts val="600"/>
+              </a:spcAft>
+            </a:pPr>
+            <a:r>
+              <a:rPr sz="1500">
+                <a:solidFill>
+                  <a:srgbClr val="22282E"/>
+                </a:solidFill>
+              </a:rPr>
+              <a:t>•  hcxdumptool / hcxtools para PMKID.</a:t>
+            </a:r>
+          </a:p>
+          <a:p>
+            <a:pPr>
+              <a:spcAft>
+                <a:spcPts val="600"/>
+              </a:spcAft>
+            </a:pPr>
+            <a:r>
+              <a:rPr sz="1500">
+                <a:solidFill>
+                  <a:srgbClr val="22282E"/>
+                </a:solidFill>
+              </a:rPr>
+              <a:t>•  hashcat para crackeo offline por GPU.</a:t>
+            </a:r>
+          </a:p>
+          <a:p>
+            <a:pPr>
+              <a:spcAft>
+                <a:spcPts val="600"/>
+              </a:spcAft>
+            </a:pPr>
+            <a:r>
+              <a:rPr sz="1500">
+                <a:solidFill>
+                  <a:srgbClr val="22282E"/>
+                </a:solidFill>
+              </a:rPr>
+              <a:t>•  Un adaptador WiFi que soporte modo monitor e inyección (chipset compatible).</a:t>
             </a:r>
           </a:p>
         </p:txBody>
@@ -4748,7 +5109,7 @@
                   <a:srgbClr val="0B3D2E"/>
                 </a:solidFill>
               </a:rPr>
-              <a:t>📝 Reto verificable</a:t>
+              <a:t>🧪 Laboratorio guiado</a:t>
             </a:r>
           </a:p>
         </p:txBody>
@@ -4786,22 +5147,97 @@
                   <a:srgbClr val="22282E"/>
                 </a:solidFill>
               </a:rPr>
-              <a:t>•  Sobre tu propia red de laboratorio configurada con una passphrase débil que tú elijas, captura el handshake (o el PMKID), realiza el crackeo offline y recupera la passphrase. Luego reconfigura el AP con WPA3 (o WPA2 con una passphrase fuerte y PMF) y demuestra que el mismo ataque ya no es viable. Entrega evidencia de ambas fases.</a:t>
-            </a:r>
-          </a:p>
-          <a:p>
-            <a:pPr>
-              <a:spcAft>
-                <a:spcPts val="600"/>
-              </a:spcAft>
-            </a:pPr>
-            <a:r>
-              <a:rPr sz="1500">
-                <a:solidFill>
-                  <a:srgbClr val="22282E"/>
-                </a:solidFill>
-              </a:rPr>
-              <a:t>•  Criterio de aceptación: recuperas la passphrase débil por diccionario y documentas que, tras endurecer el AP (WPA3/passphrase fuerte), el ataque no la obtiene. Toda la actividad es sobre tu red propia.</a:t>
+              <a:t>•  Activa modo monitor en tu adaptador:</a:t>
+            </a:r>
+          </a:p>
+          <a:p>
+            <a:pPr>
+              <a:spcAft>
+                <a:spcPts val="600"/>
+              </a:spcAft>
+            </a:pPr>
+            <a:r>
+              <a:rPr sz="1500">
+                <a:solidFill>
+                  <a:srgbClr val="22282E"/>
+                </a:solidFill>
+              </a:rPr>
+              <a:t>•  Escanea redes cercanas (identifica tu red por su BSSID):</a:t>
+            </a:r>
+          </a:p>
+          <a:p>
+            <a:pPr>
+              <a:spcAft>
+                <a:spcPts val="600"/>
+              </a:spcAft>
+            </a:pPr>
+            <a:r>
+              <a:rPr sz="1500">
+                <a:solidFill>
+                  <a:srgbClr val="22282E"/>
+                </a:solidFill>
+              </a:rPr>
+              <a:t>•  Captura en el canal de TU red:</a:t>
+            </a:r>
+          </a:p>
+          <a:p>
+            <a:pPr>
+              <a:spcAft>
+                <a:spcPts val="600"/>
+              </a:spcAft>
+            </a:pPr>
+            <a:r>
+              <a:rPr sz="1500">
+                <a:solidFill>
+                  <a:srgbClr val="22282E"/>
+                </a:solidFill>
+              </a:rPr>
+              <a:t>•  Fuerza un handshake (sobre TU red, con un dispositivo propio) mediante una deauth breve:</a:t>
+            </a:r>
+          </a:p>
+          <a:p>
+            <a:pPr>
+              <a:spcAft>
+                <a:spcPts val="600"/>
+              </a:spcAft>
+            </a:pPr>
+            <a:r>
+              <a:rPr sz="1500">
+                <a:solidFill>
+                  <a:srgbClr val="22282E"/>
+                </a:solidFill>
+              </a:rPr>
+              <a:t>•  Espera el mensaje "WPA handshake" en airodump.</a:t>
+            </a:r>
+          </a:p>
+          <a:p>
+            <a:pPr>
+              <a:spcAft>
+                <a:spcPts val="600"/>
+              </a:spcAft>
+            </a:pPr>
+            <a:r>
+              <a:rPr sz="1500">
+                <a:solidFill>
+                  <a:srgbClr val="22282E"/>
+                </a:solidFill>
+              </a:rPr>
+              <a:t>•  Alternativa PMKID (sin cliente), sobre tu red:</a:t>
+            </a:r>
+          </a:p>
+          <a:p>
+            <a:pPr>
+              <a:spcAft>
+                <a:spcPts val="600"/>
+              </a:spcAft>
+            </a:pPr>
+            <a:r>
+              <a:rPr sz="1500">
+                <a:solidFill>
+                  <a:srgbClr val="22282E"/>
+                </a:solidFill>
+              </a:rPr>
+              <a:t>•  Crackeo offline con diccionario (contra tu propia passphrase de laboratorio):</a:t>
             </a:r>
           </a:p>
         </p:txBody>
